--- a/figures/Figures2.pptx
+++ b/figures/Figures2.pptx
@@ -105,7 +105,97 @@
       </a:defRPr>
     </a:lvl9pPr>
   </p:defaultTextStyle>
+  <p:extLst>
+    <p:ext uri="{EFAFB233-063F-42B5-8137-9DF3F51BA10A}">
+      <p15:sldGuideLst xmlns:p15="http://schemas.microsoft.com/office/powerpoint/2012/main"/>
+    </p:ext>
+  </p:extLst>
 </p:presentation>
+</file>
+
+<file path=ppt/revisionInfo.xml><?xml version="1.0" encoding="utf-8"?>
+<p1510:revInfo xmlns:a="http://schemas.openxmlformats.org/drawingml/2006/main" xmlns:r="http://schemas.openxmlformats.org/officeDocument/2006/relationships" xmlns:p1510="http://schemas.microsoft.com/office/powerpoint/2015/10/main">
+  <p1510:revLst>
+    <p1510:client id="{083124B8-B8EF-4473-A3A1-CF746A5C28BE}" v="2" dt="2026-03-04T03:42:49.250"/>
+  </p1510:revLst>
+</p1510:revInfo>
+</file>
+
+<file path=ppt/changesInfos/changesInfo1.xml><?xml version="1.0" encoding="utf-8"?>
+<pc:chgInfo xmlns:a="http://schemas.openxmlformats.org/drawingml/2006/main" xmlns:r="http://schemas.openxmlformats.org/officeDocument/2006/relationships" xmlns:ac="http://schemas.microsoft.com/office/drawing/2013/main/command" xmlns:pc="http://schemas.microsoft.com/office/powerpoint/2013/main/command">
+  <pc:docChgLst>
+    <pc:chgData name="Daniel Bauman" userId="b4990c641f0077cd" providerId="LiveId" clId="{6DEDCE68-9D2E-4C8C-9998-BD219A3A306C}"/>
+    <pc:docChg chg="modSld">
+      <pc:chgData name="Daniel Bauman" userId="b4990c641f0077cd" providerId="LiveId" clId="{6DEDCE68-9D2E-4C8C-9998-BD219A3A306C}" dt="2026-03-04T03:42:49.250" v="1" actId="14826"/>
+      <pc:docMkLst>
+        <pc:docMk/>
+      </pc:docMkLst>
+      <pc:sldChg chg="modSp">
+        <pc:chgData name="Daniel Bauman" userId="b4990c641f0077cd" providerId="LiveId" clId="{6DEDCE68-9D2E-4C8C-9998-BD219A3A306C}" dt="2026-03-04T03:42:49.250" v="1" actId="14826"/>
+        <pc:sldMkLst>
+          <pc:docMk/>
+          <pc:sldMk cId="3144029983" sldId="257"/>
+        </pc:sldMkLst>
+        <pc:spChg chg="mod">
+          <ac:chgData name="Daniel Bauman" userId="b4990c641f0077cd" providerId="LiveId" clId="{6DEDCE68-9D2E-4C8C-9998-BD219A3A306C}" dt="2026-03-04T03:42:49.250" v="1" actId="14826"/>
+          <ac:spMkLst>
+            <pc:docMk/>
+            <pc:sldMk cId="3144029983" sldId="257"/>
+            <ac:spMk id="7" creationId="{F797F057-5A9F-1366-CE78-F2915E6F5318}"/>
+          </ac:spMkLst>
+        </pc:spChg>
+        <pc:spChg chg="mod">
+          <ac:chgData name="Daniel Bauman" userId="b4990c641f0077cd" providerId="LiveId" clId="{6DEDCE68-9D2E-4C8C-9998-BD219A3A306C}" dt="2026-03-04T03:42:49.250" v="1" actId="14826"/>
+          <ac:spMkLst>
+            <pc:docMk/>
+            <pc:sldMk cId="3144029983" sldId="257"/>
+            <ac:spMk id="8" creationId="{1FF9EB91-2EBF-C145-A48E-0BB3CE83DF27}"/>
+          </ac:spMkLst>
+        </pc:spChg>
+        <pc:spChg chg="mod">
+          <ac:chgData name="Daniel Bauman" userId="b4990c641f0077cd" providerId="LiveId" clId="{6DEDCE68-9D2E-4C8C-9998-BD219A3A306C}" dt="2026-03-04T03:42:49.250" v="1" actId="14826"/>
+          <ac:spMkLst>
+            <pc:docMk/>
+            <pc:sldMk cId="3144029983" sldId="257"/>
+            <ac:spMk id="11" creationId="{623BC666-55DC-235C-8436-C423BC262509}"/>
+          </ac:spMkLst>
+        </pc:spChg>
+        <pc:grpChg chg="mod">
+          <ac:chgData name="Daniel Bauman" userId="b4990c641f0077cd" providerId="LiveId" clId="{6DEDCE68-9D2E-4C8C-9998-BD219A3A306C}" dt="2026-03-04T03:42:49.250" v="1" actId="14826"/>
+          <ac:grpSpMkLst>
+            <pc:docMk/>
+            <pc:sldMk cId="3144029983" sldId="257"/>
+            <ac:grpSpMk id="18" creationId="{AC0CDC61-82D1-6247-2717-CC0BE33C8F0C}"/>
+          </ac:grpSpMkLst>
+        </pc:grpChg>
+        <pc:picChg chg="mod">
+          <ac:chgData name="Daniel Bauman" userId="b4990c641f0077cd" providerId="LiveId" clId="{6DEDCE68-9D2E-4C8C-9998-BD219A3A306C}" dt="2026-03-04T03:42:49.250" v="1" actId="14826"/>
+          <ac:picMkLst>
+            <pc:docMk/>
+            <pc:sldMk cId="3144029983" sldId="257"/>
+            <ac:picMk id="3" creationId="{1B8567C2-453B-5FDC-1426-5C0043BCDD24}"/>
+          </ac:picMkLst>
+        </pc:picChg>
+        <pc:picChg chg="mod">
+          <ac:chgData name="Daniel Bauman" userId="b4990c641f0077cd" providerId="LiveId" clId="{6DEDCE68-9D2E-4C8C-9998-BD219A3A306C}" dt="2026-03-04T03:42:49.250" v="1" actId="14826"/>
+          <ac:picMkLst>
+            <pc:docMk/>
+            <pc:sldMk cId="3144029983" sldId="257"/>
+            <ac:picMk id="6" creationId="{2CE3A8AE-A952-11A1-8A22-9F74605034A4}"/>
+          </ac:picMkLst>
+        </pc:picChg>
+        <pc:cxnChg chg="mod">
+          <ac:chgData name="Daniel Bauman" userId="b4990c641f0077cd" providerId="LiveId" clId="{6DEDCE68-9D2E-4C8C-9998-BD219A3A306C}" dt="2026-03-04T03:42:49.250" v="1" actId="14826"/>
+          <ac:cxnSpMkLst>
+            <pc:docMk/>
+            <pc:sldMk cId="3144029983" sldId="257"/>
+            <ac:cxnSpMk id="12" creationId="{ABE3D406-B6D9-824A-59AF-632828ACA913}"/>
+          </ac:cxnSpMkLst>
+        </pc:cxnChg>
+      </pc:sldChg>
+    </pc:docChg>
+  </pc:docChgLst>
+</pc:chgInfo>
 </file>
 
 <file path=ppt/slideLayouts/slideLayout1.xml><?xml version="1.0" encoding="utf-8"?>
@@ -239,7 +329,7 @@
           <a:p>
             <a:fld id="{FCD1AB06-7E12-4DA8-9C52-2EBED1DB239C}" type="datetimeFigureOut">
               <a:rPr lang="en-US" smtClean="0"/>
-              <a:t>3/2/2026</a:t>
+              <a:t>3/3/2026</a:t>
             </a:fld>
             <a:endParaRPr lang="en-US"/>
           </a:p>
@@ -409,7 +499,7 @@
           <a:p>
             <a:fld id="{FCD1AB06-7E12-4DA8-9C52-2EBED1DB239C}" type="datetimeFigureOut">
               <a:rPr lang="en-US" smtClean="0"/>
-              <a:t>3/2/2026</a:t>
+              <a:t>3/3/2026</a:t>
             </a:fld>
             <a:endParaRPr lang="en-US"/>
           </a:p>
@@ -589,7 +679,7 @@
           <a:p>
             <a:fld id="{FCD1AB06-7E12-4DA8-9C52-2EBED1DB239C}" type="datetimeFigureOut">
               <a:rPr lang="en-US" smtClean="0"/>
-              <a:t>3/2/2026</a:t>
+              <a:t>3/3/2026</a:t>
             </a:fld>
             <a:endParaRPr lang="en-US"/>
           </a:p>
@@ -759,7 +849,7 @@
           <a:p>
             <a:fld id="{FCD1AB06-7E12-4DA8-9C52-2EBED1DB239C}" type="datetimeFigureOut">
               <a:rPr lang="en-US" smtClean="0"/>
-              <a:t>3/2/2026</a:t>
+              <a:t>3/3/2026</a:t>
             </a:fld>
             <a:endParaRPr lang="en-US"/>
           </a:p>
@@ -1005,7 +1095,7 @@
           <a:p>
             <a:fld id="{FCD1AB06-7E12-4DA8-9C52-2EBED1DB239C}" type="datetimeFigureOut">
               <a:rPr lang="en-US" smtClean="0"/>
-              <a:t>3/2/2026</a:t>
+              <a:t>3/3/2026</a:t>
             </a:fld>
             <a:endParaRPr lang="en-US"/>
           </a:p>
@@ -1237,7 +1327,7 @@
           <a:p>
             <a:fld id="{FCD1AB06-7E12-4DA8-9C52-2EBED1DB239C}" type="datetimeFigureOut">
               <a:rPr lang="en-US" smtClean="0"/>
-              <a:t>3/2/2026</a:t>
+              <a:t>3/3/2026</a:t>
             </a:fld>
             <a:endParaRPr lang="en-US"/>
           </a:p>
@@ -1604,7 +1694,7 @@
           <a:p>
             <a:fld id="{FCD1AB06-7E12-4DA8-9C52-2EBED1DB239C}" type="datetimeFigureOut">
               <a:rPr lang="en-US" smtClean="0"/>
-              <a:t>3/2/2026</a:t>
+              <a:t>3/3/2026</a:t>
             </a:fld>
             <a:endParaRPr lang="en-US"/>
           </a:p>
@@ -1722,7 +1812,7 @@
           <a:p>
             <a:fld id="{FCD1AB06-7E12-4DA8-9C52-2EBED1DB239C}" type="datetimeFigureOut">
               <a:rPr lang="en-US" smtClean="0"/>
-              <a:t>3/2/2026</a:t>
+              <a:t>3/3/2026</a:t>
             </a:fld>
             <a:endParaRPr lang="en-US"/>
           </a:p>
@@ -1817,7 +1907,7 @@
           <a:p>
             <a:fld id="{FCD1AB06-7E12-4DA8-9C52-2EBED1DB239C}" type="datetimeFigureOut">
               <a:rPr lang="en-US" smtClean="0"/>
-              <a:t>3/2/2026</a:t>
+              <a:t>3/3/2026</a:t>
             </a:fld>
             <a:endParaRPr lang="en-US"/>
           </a:p>
@@ -2094,7 +2184,7 @@
           <a:p>
             <a:fld id="{FCD1AB06-7E12-4DA8-9C52-2EBED1DB239C}" type="datetimeFigureOut">
               <a:rPr lang="en-US" smtClean="0"/>
-              <a:t>3/2/2026</a:t>
+              <a:t>3/3/2026</a:t>
             </a:fld>
             <a:endParaRPr lang="en-US"/>
           </a:p>
@@ -2351,7 +2441,7 @@
           <a:p>
             <a:fld id="{FCD1AB06-7E12-4DA8-9C52-2EBED1DB239C}" type="datetimeFigureOut">
               <a:rPr lang="en-US" smtClean="0"/>
-              <a:t>3/2/2026</a:t>
+              <a:t>3/3/2026</a:t>
             </a:fld>
             <a:endParaRPr lang="en-US"/>
           </a:p>
@@ -2564,7 +2654,7 @@
           <a:p>
             <a:fld id="{FCD1AB06-7E12-4DA8-9C52-2EBED1DB239C}" type="datetimeFigureOut">
               <a:rPr lang="en-US" smtClean="0"/>
-              <a:t>3/2/2026</a:t>
+              <a:t>3/3/2026</a:t>
             </a:fld>
             <a:endParaRPr lang="en-US"/>
           </a:p>
@@ -3133,8 +3223,8 @@
             </a:prstGeom>
           </p:spPr>
         </p:pic>
-        <mc:AlternateContent xmlns:mc="http://schemas.openxmlformats.org/markup-compatibility/2006">
-          <mc:Choice xmlns:a14="http://schemas.microsoft.com/office/drawing/2010/main" Requires="a14">
+        <mc:AlternateContent xmlns:mc="http://schemas.openxmlformats.org/markup-compatibility/2006" xmlns:a14="http://schemas.microsoft.com/office/drawing/2010/main">
+          <mc:Choice Requires="a14">
             <p:sp>
               <p:nvSpPr>
                 <p:cNvPr id="12" name="TextBox 11">
@@ -3163,6 +3253,7 @@
                 </a:bodyPr>
                 <a:lstStyle/>
                 <a:p>
+                  <a:pPr/>
                   <a14:m>
                     <m:oMathPara xmlns:m="http://schemas.openxmlformats.org/officeDocument/2006/math">
                       <m:oMathParaPr>
@@ -3170,18 +3261,24 @@
                       </m:oMathParaPr>
                       <m:oMath xmlns:m="http://schemas.openxmlformats.org/officeDocument/2006/math">
                         <m:r>
-                          <a:rPr lang="en-US" sz="1400" b="0" i="0" smtClean="0"/>
+                          <a:rPr lang="en-US" sz="1400" b="0" i="0" smtClean="0">
+                            <a:latin typeface="Cambria Math" panose="02040503050406030204" pitchFamily="18" charset="0"/>
+                          </a:rPr>
                           <m:t>(</m:t>
                         </m:r>
                         <m:r>
                           <m:rPr>
                             <m:sty m:val="p"/>
                           </m:rPr>
-                          <a:rPr lang="en-US" sz="1400" b="0" i="0" smtClean="0"/>
+                          <a:rPr lang="en-US" sz="1400" b="0" i="0" smtClean="0">
+                            <a:latin typeface="Cambria Math" panose="02040503050406030204" pitchFamily="18" charset="0"/>
+                          </a:rPr>
                           <m:t>a</m:t>
                         </m:r>
                         <m:r>
-                          <a:rPr lang="en-US" sz="1400" b="0" i="0" smtClean="0"/>
+                          <a:rPr lang="en-US" sz="1400" b="0" i="0" smtClean="0">
+                            <a:latin typeface="Cambria Math" panose="02040503050406030204" pitchFamily="18" charset="0"/>
+                          </a:rPr>
                           <m:t>)</m:t>
                         </m:r>
                       </m:oMath>
@@ -3192,7 +3289,7 @@
               </p:txBody>
             </p:sp>
           </mc:Choice>
-          <mc:Fallback>
+          <mc:Fallback xmlns="">
             <p:sp>
               <p:nvSpPr>
                 <p:cNvPr id="12" name="TextBox 11">
@@ -3237,8 +3334,8 @@
             </p:sp>
           </mc:Fallback>
         </mc:AlternateContent>
-        <mc:AlternateContent xmlns:mc="http://schemas.openxmlformats.org/markup-compatibility/2006">
-          <mc:Choice xmlns:a14="http://schemas.microsoft.com/office/drawing/2010/main" Requires="a14">
+        <mc:AlternateContent xmlns:mc="http://schemas.openxmlformats.org/markup-compatibility/2006" xmlns:a14="http://schemas.microsoft.com/office/drawing/2010/main">
+          <mc:Choice Requires="a14">
             <p:sp>
               <p:nvSpPr>
                 <p:cNvPr id="13" name="TextBox 12">
@@ -3267,6 +3364,7 @@
                 </a:bodyPr>
                 <a:lstStyle/>
                 <a:p>
+                  <a:pPr/>
                   <a14:m>
                     <m:oMathPara xmlns:m="http://schemas.openxmlformats.org/officeDocument/2006/math">
                       <m:oMathParaPr>
@@ -3274,18 +3372,24 @@
                       </m:oMathParaPr>
                       <m:oMath xmlns:m="http://schemas.openxmlformats.org/officeDocument/2006/math">
                         <m:r>
-                          <a:rPr lang="en-US" sz="1400" b="0" i="0" smtClean="0"/>
+                          <a:rPr lang="en-US" sz="1400" b="0" i="0" smtClean="0">
+                            <a:latin typeface="Cambria Math" panose="02040503050406030204" pitchFamily="18" charset="0"/>
+                          </a:rPr>
                           <m:t>(</m:t>
                         </m:r>
                         <m:r>
                           <m:rPr>
                             <m:sty m:val="p"/>
                           </m:rPr>
-                          <a:rPr lang="en-US" sz="1400" b="0" i="0" smtClean="0"/>
+                          <a:rPr lang="en-US" sz="1400" b="0" i="0" smtClean="0">
+                            <a:latin typeface="Cambria Math" panose="02040503050406030204" pitchFamily="18" charset="0"/>
+                          </a:rPr>
                           <m:t>b</m:t>
                         </m:r>
                         <m:r>
-                          <a:rPr lang="en-US" sz="1400" b="0" i="0" smtClean="0"/>
+                          <a:rPr lang="en-US" sz="1400" b="0" i="0" smtClean="0">
+                            <a:latin typeface="Cambria Math" panose="02040503050406030204" pitchFamily="18" charset="0"/>
+                          </a:rPr>
                           <m:t>)</m:t>
                         </m:r>
                       </m:oMath>
@@ -3296,7 +3400,7 @@
               </p:txBody>
             </p:sp>
           </mc:Choice>
-          <mc:Fallback>
+          <mc:Fallback xmlns="">
             <p:sp>
               <p:nvSpPr>
                 <p:cNvPr id="13" name="TextBox 12">
@@ -3341,8 +3445,8 @@
             </p:sp>
           </mc:Fallback>
         </mc:AlternateContent>
-        <mc:AlternateContent xmlns:mc="http://schemas.openxmlformats.org/markup-compatibility/2006">
-          <mc:Choice xmlns:a14="http://schemas.microsoft.com/office/drawing/2010/main" Requires="a14">
+        <mc:AlternateContent xmlns:mc="http://schemas.openxmlformats.org/markup-compatibility/2006" xmlns:a14="http://schemas.microsoft.com/office/drawing/2010/main">
+          <mc:Choice Requires="a14">
             <p:sp>
               <p:nvSpPr>
                 <p:cNvPr id="15" name="TextBox 14">
@@ -3371,6 +3475,7 @@
                 </a:bodyPr>
                 <a:lstStyle/>
                 <a:p>
+                  <a:pPr/>
                   <a14:m>
                     <m:oMathPara xmlns:m="http://schemas.openxmlformats.org/officeDocument/2006/math">
                       <m:oMathParaPr>
@@ -3378,18 +3483,24 @@
                       </m:oMathParaPr>
                       <m:oMath xmlns:m="http://schemas.openxmlformats.org/officeDocument/2006/math">
                         <m:r>
-                          <a:rPr lang="en-US" sz="1400" b="0" i="0" smtClean="0"/>
+                          <a:rPr lang="en-US" sz="1400" b="0" i="0" smtClean="0">
+                            <a:latin typeface="Cambria Math" panose="02040503050406030204" pitchFamily="18" charset="0"/>
+                          </a:rPr>
                           <m:t>(</m:t>
                         </m:r>
                         <m:r>
                           <m:rPr>
                             <m:sty m:val="p"/>
                           </m:rPr>
-                          <a:rPr lang="en-US" sz="1400" b="0" i="0" smtClean="0"/>
+                          <a:rPr lang="en-US" sz="1400" b="0" i="0" smtClean="0">
+                            <a:latin typeface="Cambria Math" panose="02040503050406030204" pitchFamily="18" charset="0"/>
+                          </a:rPr>
                           <m:t>c</m:t>
                         </m:r>
                         <m:r>
-                          <a:rPr lang="en-US" sz="1400" b="0" i="0" smtClean="0"/>
+                          <a:rPr lang="en-US" sz="1400" b="0" i="0" smtClean="0">
+                            <a:latin typeface="Cambria Math" panose="02040503050406030204" pitchFamily="18" charset="0"/>
+                          </a:rPr>
                           <m:t>)</m:t>
                         </m:r>
                       </m:oMath>
@@ -3400,7 +3511,7 @@
               </p:txBody>
             </p:sp>
           </mc:Choice>
-          <mc:Fallback>
+          <mc:Fallback xmlns="">
             <p:sp>
               <p:nvSpPr>
                 <p:cNvPr id="15" name="TextBox 14">
@@ -3445,8 +3556,8 @@
             </p:sp>
           </mc:Fallback>
         </mc:AlternateContent>
-        <mc:AlternateContent xmlns:mc="http://schemas.openxmlformats.org/markup-compatibility/2006">
-          <mc:Choice xmlns:a14="http://schemas.microsoft.com/office/drawing/2010/main" Requires="a14">
+        <mc:AlternateContent xmlns:mc="http://schemas.openxmlformats.org/markup-compatibility/2006" xmlns:a14="http://schemas.microsoft.com/office/drawing/2010/main">
+          <mc:Choice Requires="a14">
             <p:sp>
               <p:nvSpPr>
                 <p:cNvPr id="16" name="TextBox 15">
@@ -3475,6 +3586,7 @@
                 </a:bodyPr>
                 <a:lstStyle/>
                 <a:p>
+                  <a:pPr/>
                   <a14:m>
                     <m:oMathPara xmlns:m="http://schemas.openxmlformats.org/officeDocument/2006/math">
                       <m:oMathParaPr>
@@ -3482,18 +3594,24 @@
                       </m:oMathParaPr>
                       <m:oMath xmlns:m="http://schemas.openxmlformats.org/officeDocument/2006/math">
                         <m:r>
-                          <a:rPr lang="en-US" sz="1400" b="0" i="0" smtClean="0"/>
+                          <a:rPr lang="en-US" sz="1400" b="0" i="0" smtClean="0">
+                            <a:latin typeface="Cambria Math" panose="02040503050406030204" pitchFamily="18" charset="0"/>
+                          </a:rPr>
                           <m:t>(</m:t>
                         </m:r>
                         <m:r>
                           <m:rPr>
                             <m:sty m:val="p"/>
                           </m:rPr>
-                          <a:rPr lang="en-US" sz="1400" b="0" i="0" smtClean="0"/>
+                          <a:rPr lang="en-US" sz="1400" b="0" i="0" smtClean="0">
+                            <a:latin typeface="Cambria Math" panose="02040503050406030204" pitchFamily="18" charset="0"/>
+                          </a:rPr>
                           <m:t>d</m:t>
                         </m:r>
                         <m:r>
-                          <a:rPr lang="en-US" sz="1400" b="0" i="0" smtClean="0"/>
+                          <a:rPr lang="en-US" sz="1400" b="0" i="0" smtClean="0">
+                            <a:latin typeface="Cambria Math" panose="02040503050406030204" pitchFamily="18" charset="0"/>
+                          </a:rPr>
                           <m:t>)</m:t>
                         </m:r>
                       </m:oMath>
@@ -3504,7 +3622,7 @@
               </p:txBody>
             </p:sp>
           </mc:Choice>
-          <mc:Fallback>
+          <mc:Fallback xmlns="">
             <p:sp>
               <p:nvSpPr>
                 <p:cNvPr id="16" name="TextBox 15">
@@ -3808,8 +3926,8 @@
             </a:prstGeom>
           </p:spPr>
         </p:pic>
-        <mc:AlternateContent xmlns:mc="http://schemas.openxmlformats.org/markup-compatibility/2006">
-          <mc:Choice xmlns:a14="http://schemas.microsoft.com/office/drawing/2010/main" Requires="a14">
+        <mc:AlternateContent xmlns:mc="http://schemas.openxmlformats.org/markup-compatibility/2006" xmlns:a14="http://schemas.microsoft.com/office/drawing/2010/main">
+          <mc:Choice Requires="a14">
             <p:sp>
               <p:nvSpPr>
                 <p:cNvPr id="7" name="TextBox 6">
@@ -3838,6 +3956,7 @@
                 </a:bodyPr>
                 <a:lstStyle/>
                 <a:p>
+                  <a:pPr/>
                   <a14:m>
                     <m:oMathPara xmlns:m="http://schemas.openxmlformats.org/officeDocument/2006/math">
                       <m:oMathParaPr>
@@ -3845,18 +3964,24 @@
                       </m:oMathParaPr>
                       <m:oMath xmlns:m="http://schemas.openxmlformats.org/officeDocument/2006/math">
                         <m:r>
-                          <a:rPr lang="en-US" sz="1400" b="0" i="0" smtClean="0"/>
+                          <a:rPr lang="en-US" sz="1400" b="0" i="0" smtClean="0">
+                            <a:latin typeface="Cambria Math" panose="02040503050406030204" pitchFamily="18" charset="0"/>
+                          </a:rPr>
                           <m:t>(</m:t>
                         </m:r>
                         <m:r>
                           <m:rPr>
                             <m:sty m:val="p"/>
                           </m:rPr>
-                          <a:rPr lang="en-US" sz="1400" b="0" i="0" smtClean="0"/>
+                          <a:rPr lang="en-US" sz="1400" b="0" i="0" smtClean="0">
+                            <a:latin typeface="Cambria Math" panose="02040503050406030204" pitchFamily="18" charset="0"/>
+                          </a:rPr>
                           <m:t>a</m:t>
                         </m:r>
                         <m:r>
-                          <a:rPr lang="en-US" sz="1400" b="0" i="0" smtClean="0"/>
+                          <a:rPr lang="en-US" sz="1400" b="0" i="0" smtClean="0">
+                            <a:latin typeface="Cambria Math" panose="02040503050406030204" pitchFamily="18" charset="0"/>
+                          </a:rPr>
                           <m:t>)</m:t>
                         </m:r>
                       </m:oMath>
@@ -3867,7 +3992,7 @@
               </p:txBody>
             </p:sp>
           </mc:Choice>
-          <mc:Fallback>
+          <mc:Fallback xmlns="">
             <p:sp>
               <p:nvSpPr>
                 <p:cNvPr id="7" name="TextBox 6">
@@ -3912,8 +4037,8 @@
             </p:sp>
           </mc:Fallback>
         </mc:AlternateContent>
-        <mc:AlternateContent xmlns:mc="http://schemas.openxmlformats.org/markup-compatibility/2006">
-          <mc:Choice xmlns:a14="http://schemas.microsoft.com/office/drawing/2010/main" Requires="a14">
+        <mc:AlternateContent xmlns:mc="http://schemas.openxmlformats.org/markup-compatibility/2006" xmlns:a14="http://schemas.microsoft.com/office/drawing/2010/main">
+          <mc:Choice Requires="a14">
             <p:sp>
               <p:nvSpPr>
                 <p:cNvPr id="8" name="TextBox 7">
@@ -3942,6 +4067,7 @@
                 </a:bodyPr>
                 <a:lstStyle/>
                 <a:p>
+                  <a:pPr/>
                   <a14:m>
                     <m:oMathPara xmlns:m="http://schemas.openxmlformats.org/officeDocument/2006/math">
                       <m:oMathParaPr>
@@ -3949,18 +4075,24 @@
                       </m:oMathParaPr>
                       <m:oMath xmlns:m="http://schemas.openxmlformats.org/officeDocument/2006/math">
                         <m:r>
-                          <a:rPr lang="en-US" sz="1400" b="0" i="0" smtClean="0"/>
+                          <a:rPr lang="en-US" sz="1400" b="0" i="0" smtClean="0">
+                            <a:latin typeface="Cambria Math" panose="02040503050406030204" pitchFamily="18" charset="0"/>
+                          </a:rPr>
                           <m:t>(</m:t>
                         </m:r>
                         <m:r>
                           <m:rPr>
                             <m:sty m:val="p"/>
                           </m:rPr>
-                          <a:rPr lang="en-US" sz="1400" b="0" i="0" smtClean="0"/>
+                          <a:rPr lang="en-US" sz="1400" b="0" i="0" smtClean="0">
+                            <a:latin typeface="Cambria Math" panose="02040503050406030204" pitchFamily="18" charset="0"/>
+                          </a:rPr>
                           <m:t>b</m:t>
                         </m:r>
                         <m:r>
-                          <a:rPr lang="en-US" sz="1400" b="0" i="0" smtClean="0"/>
+                          <a:rPr lang="en-US" sz="1400" b="0" i="0" smtClean="0">
+                            <a:latin typeface="Cambria Math" panose="02040503050406030204" pitchFamily="18" charset="0"/>
+                          </a:rPr>
                           <m:t>)</m:t>
                         </m:r>
                       </m:oMath>
@@ -3971,7 +4103,7 @@
               </p:txBody>
             </p:sp>
           </mc:Choice>
-          <mc:Fallback>
+          <mc:Fallback xmlns="">
             <p:sp>
               <p:nvSpPr>
                 <p:cNvPr id="8" name="TextBox 7">

--- a/figures/Figures2.pptx
+++ b/figures/Figures2.pptx
@@ -6,7 +6,9 @@
   </p:sldMasterIdLst>
   <p:sldIdLst>
     <p:sldId id="256" r:id="rId2"/>
-    <p:sldId id="257" r:id="rId3"/>
+    <p:sldId id="258" r:id="rId3"/>
+    <p:sldId id="257" r:id="rId4"/>
+    <p:sldId id="259" r:id="rId5"/>
   </p:sldIdLst>
   <p:sldSz cx="7772400" cy="10058400"/>
   <p:notesSz cx="6858000" cy="9144000"/>
@@ -329,7 +331,7 @@
           <a:p>
             <a:fld id="{FCD1AB06-7E12-4DA8-9C52-2EBED1DB239C}" type="datetimeFigureOut">
               <a:rPr lang="en-US" smtClean="0"/>
-              <a:t>3/3/2026</a:t>
+              <a:t>3/19/2026</a:t>
             </a:fld>
             <a:endParaRPr lang="en-US"/>
           </a:p>
@@ -499,7 +501,7 @@
           <a:p>
             <a:fld id="{FCD1AB06-7E12-4DA8-9C52-2EBED1DB239C}" type="datetimeFigureOut">
               <a:rPr lang="en-US" smtClean="0"/>
-              <a:t>3/3/2026</a:t>
+              <a:t>3/19/2026</a:t>
             </a:fld>
             <a:endParaRPr lang="en-US"/>
           </a:p>
@@ -679,7 +681,7 @@
           <a:p>
             <a:fld id="{FCD1AB06-7E12-4DA8-9C52-2EBED1DB239C}" type="datetimeFigureOut">
               <a:rPr lang="en-US" smtClean="0"/>
-              <a:t>3/3/2026</a:t>
+              <a:t>3/19/2026</a:t>
             </a:fld>
             <a:endParaRPr lang="en-US"/>
           </a:p>
@@ -849,7 +851,7 @@
           <a:p>
             <a:fld id="{FCD1AB06-7E12-4DA8-9C52-2EBED1DB239C}" type="datetimeFigureOut">
               <a:rPr lang="en-US" smtClean="0"/>
-              <a:t>3/3/2026</a:t>
+              <a:t>3/19/2026</a:t>
             </a:fld>
             <a:endParaRPr lang="en-US"/>
           </a:p>
@@ -1095,7 +1097,7 @@
           <a:p>
             <a:fld id="{FCD1AB06-7E12-4DA8-9C52-2EBED1DB239C}" type="datetimeFigureOut">
               <a:rPr lang="en-US" smtClean="0"/>
-              <a:t>3/3/2026</a:t>
+              <a:t>3/19/2026</a:t>
             </a:fld>
             <a:endParaRPr lang="en-US"/>
           </a:p>
@@ -1327,7 +1329,7 @@
           <a:p>
             <a:fld id="{FCD1AB06-7E12-4DA8-9C52-2EBED1DB239C}" type="datetimeFigureOut">
               <a:rPr lang="en-US" smtClean="0"/>
-              <a:t>3/3/2026</a:t>
+              <a:t>3/19/2026</a:t>
             </a:fld>
             <a:endParaRPr lang="en-US"/>
           </a:p>
@@ -1694,7 +1696,7 @@
           <a:p>
             <a:fld id="{FCD1AB06-7E12-4DA8-9C52-2EBED1DB239C}" type="datetimeFigureOut">
               <a:rPr lang="en-US" smtClean="0"/>
-              <a:t>3/3/2026</a:t>
+              <a:t>3/19/2026</a:t>
             </a:fld>
             <a:endParaRPr lang="en-US"/>
           </a:p>
@@ -1812,7 +1814,7 @@
           <a:p>
             <a:fld id="{FCD1AB06-7E12-4DA8-9C52-2EBED1DB239C}" type="datetimeFigureOut">
               <a:rPr lang="en-US" smtClean="0"/>
-              <a:t>3/3/2026</a:t>
+              <a:t>3/19/2026</a:t>
             </a:fld>
             <a:endParaRPr lang="en-US"/>
           </a:p>
@@ -1907,7 +1909,7 @@
           <a:p>
             <a:fld id="{FCD1AB06-7E12-4DA8-9C52-2EBED1DB239C}" type="datetimeFigureOut">
               <a:rPr lang="en-US" smtClean="0"/>
-              <a:t>3/3/2026</a:t>
+              <a:t>3/19/2026</a:t>
             </a:fld>
             <a:endParaRPr lang="en-US"/>
           </a:p>
@@ -2184,7 +2186,7 @@
           <a:p>
             <a:fld id="{FCD1AB06-7E12-4DA8-9C52-2EBED1DB239C}" type="datetimeFigureOut">
               <a:rPr lang="en-US" smtClean="0"/>
-              <a:t>3/3/2026</a:t>
+              <a:t>3/19/2026</a:t>
             </a:fld>
             <a:endParaRPr lang="en-US"/>
           </a:p>
@@ -2441,7 +2443,7 @@
           <a:p>
             <a:fld id="{FCD1AB06-7E12-4DA8-9C52-2EBED1DB239C}" type="datetimeFigureOut">
               <a:rPr lang="en-US" smtClean="0"/>
-              <a:t>3/3/2026</a:t>
+              <a:t>3/19/2026</a:t>
             </a:fld>
             <a:endParaRPr lang="en-US"/>
           </a:p>
@@ -2654,7 +2656,7 @@
           <a:p>
             <a:fld id="{FCD1AB06-7E12-4DA8-9C52-2EBED1DB239C}" type="datetimeFigureOut">
               <a:rPr lang="en-US" smtClean="0"/>
-              <a:t>3/3/2026</a:t>
+              <a:t>3/19/2026</a:t>
             </a:fld>
             <a:endParaRPr lang="en-US"/>
           </a:p>
@@ -3824,6 +3826,651 @@
   <p:cSld>
     <p:spTree>
       <p:nvGrpSpPr>
+        <p:cNvPr id="1" name="">
+          <a:extLst>
+            <a:ext uri="{FF2B5EF4-FFF2-40B4-BE49-F238E27FC236}">
+              <a16:creationId xmlns:a16="http://schemas.microsoft.com/office/drawing/2014/main" id="{EF73D971-95A2-D0E6-44FE-EA15DAFBB018}"/>
+            </a:ext>
+          </a:extLst>
+        </p:cNvPr>
+        <p:cNvGrpSpPr/>
+        <p:nvPr/>
+      </p:nvGrpSpPr>
+      <p:grpSpPr>
+        <a:xfrm>
+          <a:off x="0" y="0"/>
+          <a:ext cx="0" cy="0"/>
+          <a:chOff x="0" y="0"/>
+          <a:chExt cx="0" cy="0"/>
+        </a:xfrm>
+      </p:grpSpPr>
+      <p:grpSp>
+        <p:nvGrpSpPr>
+          <p:cNvPr id="2" name="Group 1">
+            <a:extLst>
+              <a:ext uri="{FF2B5EF4-FFF2-40B4-BE49-F238E27FC236}">
+                <a16:creationId xmlns:a16="http://schemas.microsoft.com/office/drawing/2014/main" id="{114D7AEC-AA96-965D-7131-E801623D780F}"/>
+              </a:ext>
+            </a:extLst>
+          </p:cNvPr>
+          <p:cNvGrpSpPr/>
+          <p:nvPr/>
+        </p:nvGrpSpPr>
+        <p:grpSpPr>
+          <a:xfrm>
+            <a:off x="558737" y="999876"/>
+            <a:ext cx="6654926" cy="5596375"/>
+            <a:chOff x="558737" y="999876"/>
+            <a:chExt cx="6654926" cy="5596375"/>
+          </a:xfrm>
+        </p:grpSpPr>
+        <p:pic>
+          <p:nvPicPr>
+            <p:cNvPr id="5" name="Picture 4">
+              <a:extLst>
+                <a:ext uri="{FF2B5EF4-FFF2-40B4-BE49-F238E27FC236}">
+                  <a16:creationId xmlns:a16="http://schemas.microsoft.com/office/drawing/2014/main" id="{D6131118-9ABC-50AE-ACB7-CBD996B6679A}"/>
+                </a:ext>
+              </a:extLst>
+            </p:cNvPr>
+            <p:cNvPicPr>
+              <a:picLocks noChangeAspect="1"/>
+            </p:cNvPicPr>
+            <p:nvPr/>
+          </p:nvPicPr>
+          <p:blipFill>
+            <a:blip r:embed="rId2">
+              <a:extLst>
+                <a:ext uri="{28A0092B-C50C-407E-A947-70E740481C1C}">
+                  <a14:useLocalDpi xmlns:a14="http://schemas.microsoft.com/office/drawing/2010/main" val="0"/>
+                </a:ext>
+              </a:extLst>
+            </a:blip>
+            <a:stretch>
+              <a:fillRect/>
+            </a:stretch>
+          </p:blipFill>
+          <p:spPr>
+            <a:xfrm>
+              <a:off x="914400" y="999876"/>
+              <a:ext cx="2743200" cy="2743200"/>
+            </a:xfrm>
+            <a:prstGeom prst="rect">
+              <a:avLst/>
+            </a:prstGeom>
+          </p:spPr>
+        </p:pic>
+        <p:pic>
+          <p:nvPicPr>
+            <p:cNvPr id="7" name="Picture 6">
+              <a:extLst>
+                <a:ext uri="{FF2B5EF4-FFF2-40B4-BE49-F238E27FC236}">
+                  <a16:creationId xmlns:a16="http://schemas.microsoft.com/office/drawing/2014/main" id="{108D5C73-430E-C869-0878-926C6B87B7A8}"/>
+                </a:ext>
+              </a:extLst>
+            </p:cNvPr>
+            <p:cNvPicPr>
+              <a:picLocks noChangeAspect="1"/>
+            </p:cNvPicPr>
+            <p:nvPr/>
+          </p:nvPicPr>
+          <p:blipFill>
+            <a:blip r:embed="rId3">
+              <a:extLst>
+                <a:ext uri="{28A0092B-C50C-407E-A947-70E740481C1C}">
+                  <a14:useLocalDpi xmlns:a14="http://schemas.microsoft.com/office/drawing/2010/main" val="0"/>
+                </a:ext>
+              </a:extLst>
+            </a:blip>
+            <a:stretch>
+              <a:fillRect/>
+            </a:stretch>
+          </p:blipFill>
+          <p:spPr>
+            <a:xfrm>
+              <a:off x="914400" y="3851551"/>
+              <a:ext cx="2743200" cy="2743200"/>
+            </a:xfrm>
+            <a:prstGeom prst="rect">
+              <a:avLst/>
+            </a:prstGeom>
+          </p:spPr>
+        </p:pic>
+        <p:pic>
+          <p:nvPicPr>
+            <p:cNvPr id="9" name="Picture 8">
+              <a:extLst>
+                <a:ext uri="{FF2B5EF4-FFF2-40B4-BE49-F238E27FC236}">
+                  <a16:creationId xmlns:a16="http://schemas.microsoft.com/office/drawing/2014/main" id="{CCA5DAF7-A5F7-F3C6-F293-D0DE245D22F7}"/>
+                </a:ext>
+              </a:extLst>
+            </p:cNvPr>
+            <p:cNvPicPr>
+              <a:picLocks noChangeAspect="1"/>
+            </p:cNvPicPr>
+            <p:nvPr/>
+          </p:nvPicPr>
+          <p:blipFill>
+            <a:blip r:embed="rId4">
+              <a:extLst>
+                <a:ext uri="{28A0092B-C50C-407E-A947-70E740481C1C}">
+                  <a14:useLocalDpi xmlns:a14="http://schemas.microsoft.com/office/drawing/2010/main" val="0"/>
+                </a:ext>
+              </a:extLst>
+            </a:blip>
+            <a:stretch>
+              <a:fillRect/>
+            </a:stretch>
+          </p:blipFill>
+          <p:spPr>
+            <a:xfrm>
+              <a:off x="4470463" y="3853051"/>
+              <a:ext cx="2743200" cy="2743200"/>
+            </a:xfrm>
+            <a:prstGeom prst="rect">
+              <a:avLst/>
+            </a:prstGeom>
+          </p:spPr>
+        </p:pic>
+        <p:pic>
+          <p:nvPicPr>
+            <p:cNvPr id="11" name="Picture 10">
+              <a:extLst>
+                <a:ext uri="{FF2B5EF4-FFF2-40B4-BE49-F238E27FC236}">
+                  <a16:creationId xmlns:a16="http://schemas.microsoft.com/office/drawing/2014/main" id="{F887BE1D-4F70-21C2-C304-8F647C76C61F}"/>
+                </a:ext>
+              </a:extLst>
+            </p:cNvPr>
+            <p:cNvPicPr>
+              <a:picLocks noChangeAspect="1"/>
+            </p:cNvPicPr>
+            <p:nvPr/>
+          </p:nvPicPr>
+          <p:blipFill>
+            <a:blip r:embed="rId5">
+              <a:extLst>
+                <a:ext uri="{28A0092B-C50C-407E-A947-70E740481C1C}">
+                  <a14:useLocalDpi xmlns:a14="http://schemas.microsoft.com/office/drawing/2010/main" val="0"/>
+                </a:ext>
+              </a:extLst>
+            </a:blip>
+            <a:stretch>
+              <a:fillRect/>
+            </a:stretch>
+          </p:blipFill>
+          <p:spPr>
+            <a:xfrm>
+              <a:off x="4470463" y="1001376"/>
+              <a:ext cx="2743200" cy="2743200"/>
+            </a:xfrm>
+            <a:prstGeom prst="rect">
+              <a:avLst/>
+            </a:prstGeom>
+          </p:spPr>
+        </p:pic>
+        <mc:AlternateContent xmlns:mc="http://schemas.openxmlformats.org/markup-compatibility/2006">
+          <mc:Choice xmlns:a14="http://schemas.microsoft.com/office/drawing/2010/main" Requires="a14">
+            <p:sp>
+              <p:nvSpPr>
+                <p:cNvPr id="12" name="TextBox 11">
+                  <a:extLst>
+                    <a:ext uri="{FF2B5EF4-FFF2-40B4-BE49-F238E27FC236}">
+                      <a16:creationId xmlns:a16="http://schemas.microsoft.com/office/drawing/2014/main" id="{F2A123FF-4E8A-4094-58E9-77FAC6D8DC5A}"/>
+                    </a:ext>
+                  </a:extLst>
+                </p:cNvPr>
+                <p:cNvSpPr txBox="1"/>
+                <p:nvPr/>
+              </p:nvSpPr>
+              <p:spPr>
+                <a:xfrm>
+                  <a:off x="558737" y="1004670"/>
+                  <a:ext cx="355663" cy="307777"/>
+                </a:xfrm>
+                <a:prstGeom prst="rect">
+                  <a:avLst/>
+                </a:prstGeom>
+                <a:noFill/>
+              </p:spPr>
+              <p:txBody>
+                <a:bodyPr wrap="square" rtlCol="0">
+                  <a:spAutoFit/>
+                </a:bodyPr>
+                <a:lstStyle/>
+                <a:p>
+                  <a:pPr/>
+                  <a14:m>
+                    <m:oMathPara xmlns:m="http://schemas.openxmlformats.org/officeDocument/2006/math">
+                      <m:oMathParaPr>
+                        <m:jc m:val="centerGroup"/>
+                      </m:oMathParaPr>
+                      <m:oMath xmlns:m="http://schemas.openxmlformats.org/officeDocument/2006/math">
+                        <m:r>
+                          <a:rPr lang="en-US" sz="1400" b="0" i="0" smtClean="0">
+                            <a:latin typeface="Cambria Math" panose="02040503050406030204" pitchFamily="18" charset="0"/>
+                          </a:rPr>
+                          <m:t>(</m:t>
+                        </m:r>
+                        <m:r>
+                          <m:rPr>
+                            <m:sty m:val="p"/>
+                          </m:rPr>
+                          <a:rPr lang="en-US" sz="1400" b="0" i="0" smtClean="0">
+                            <a:latin typeface="Cambria Math" panose="02040503050406030204" pitchFamily="18" charset="0"/>
+                          </a:rPr>
+                          <m:t>a</m:t>
+                        </m:r>
+                        <m:r>
+                          <a:rPr lang="en-US" sz="1400" b="0" i="0" smtClean="0">
+                            <a:latin typeface="Cambria Math" panose="02040503050406030204" pitchFamily="18" charset="0"/>
+                          </a:rPr>
+                          <m:t>)</m:t>
+                        </m:r>
+                      </m:oMath>
+                    </m:oMathPara>
+                  </a14:m>
+                  <a:endParaRPr lang="en-US" sz="1400" dirty="0"/>
+                </a:p>
+              </p:txBody>
+            </p:sp>
+          </mc:Choice>
+          <mc:Fallback>
+            <p:sp>
+              <p:nvSpPr>
+                <p:cNvPr id="12" name="TextBox 11">
+                  <a:extLst>
+                    <a:ext uri="{FF2B5EF4-FFF2-40B4-BE49-F238E27FC236}">
+                      <a16:creationId xmlns:a16="http://schemas.microsoft.com/office/drawing/2014/main" id="{F2A123FF-4E8A-4094-58E9-77FAC6D8DC5A}"/>
+                    </a:ext>
+                  </a:extLst>
+                </p:cNvPr>
+                <p:cNvSpPr txBox="1">
+                  <a:spLocks noRot="1" noChangeAspect="1" noMove="1" noResize="1" noEditPoints="1" noAdjustHandles="1" noChangeArrowheads="1" noChangeShapeType="1" noTextEdit="1"/>
+                </p:cNvSpPr>
+                <p:nvPr/>
+              </p:nvSpPr>
+              <p:spPr>
+                <a:xfrm>
+                  <a:off x="558737" y="1004670"/>
+                  <a:ext cx="355663" cy="307777"/>
+                </a:xfrm>
+                <a:prstGeom prst="rect">
+                  <a:avLst/>
+                </a:prstGeom>
+                <a:blipFill>
+                  <a:blip r:embed="rId6"/>
+                  <a:stretch>
+                    <a:fillRect r="-13793" b="-8000"/>
+                  </a:stretch>
+                </a:blipFill>
+              </p:spPr>
+              <p:txBody>
+                <a:bodyPr/>
+                <a:lstStyle/>
+                <a:p>
+                  <a:r>
+                    <a:rPr lang="en-US">
+                      <a:noFill/>
+                    </a:rPr>
+                    <a:t> </a:t>
+                  </a:r>
+                </a:p>
+              </p:txBody>
+            </p:sp>
+          </mc:Fallback>
+        </mc:AlternateContent>
+        <mc:AlternateContent xmlns:mc="http://schemas.openxmlformats.org/markup-compatibility/2006">
+          <mc:Choice xmlns:a14="http://schemas.microsoft.com/office/drawing/2010/main" Requires="a14">
+            <p:sp>
+              <p:nvSpPr>
+                <p:cNvPr id="13" name="TextBox 12">
+                  <a:extLst>
+                    <a:ext uri="{FF2B5EF4-FFF2-40B4-BE49-F238E27FC236}">
+                      <a16:creationId xmlns:a16="http://schemas.microsoft.com/office/drawing/2014/main" id="{0A9FD6B8-2B9B-D2C5-3A20-14962E301DF1}"/>
+                    </a:ext>
+                  </a:extLst>
+                </p:cNvPr>
+                <p:cNvSpPr txBox="1"/>
+                <p:nvPr/>
+              </p:nvSpPr>
+              <p:spPr>
+                <a:xfrm>
+                  <a:off x="4114800" y="1006170"/>
+                  <a:ext cx="355663" cy="307777"/>
+                </a:xfrm>
+                <a:prstGeom prst="rect">
+                  <a:avLst/>
+                </a:prstGeom>
+                <a:noFill/>
+              </p:spPr>
+              <p:txBody>
+                <a:bodyPr wrap="square" rtlCol="0">
+                  <a:spAutoFit/>
+                </a:bodyPr>
+                <a:lstStyle/>
+                <a:p>
+                  <a:pPr/>
+                  <a14:m>
+                    <m:oMathPara xmlns:m="http://schemas.openxmlformats.org/officeDocument/2006/math">
+                      <m:oMathParaPr>
+                        <m:jc m:val="centerGroup"/>
+                      </m:oMathParaPr>
+                      <m:oMath xmlns:m="http://schemas.openxmlformats.org/officeDocument/2006/math">
+                        <m:r>
+                          <a:rPr lang="en-US" sz="1400" b="0" i="0" smtClean="0">
+                            <a:latin typeface="Cambria Math" panose="02040503050406030204" pitchFamily="18" charset="0"/>
+                          </a:rPr>
+                          <m:t>(</m:t>
+                        </m:r>
+                        <m:r>
+                          <m:rPr>
+                            <m:sty m:val="p"/>
+                          </m:rPr>
+                          <a:rPr lang="en-US" sz="1400" b="0" i="0" smtClean="0">
+                            <a:latin typeface="Cambria Math" panose="02040503050406030204" pitchFamily="18" charset="0"/>
+                          </a:rPr>
+                          <m:t>b</m:t>
+                        </m:r>
+                        <m:r>
+                          <a:rPr lang="en-US" sz="1400" b="0" i="0" smtClean="0">
+                            <a:latin typeface="Cambria Math" panose="02040503050406030204" pitchFamily="18" charset="0"/>
+                          </a:rPr>
+                          <m:t>)</m:t>
+                        </m:r>
+                      </m:oMath>
+                    </m:oMathPara>
+                  </a14:m>
+                  <a:endParaRPr lang="en-US" sz="1400" dirty="0"/>
+                </a:p>
+              </p:txBody>
+            </p:sp>
+          </mc:Choice>
+          <mc:Fallback>
+            <p:sp>
+              <p:nvSpPr>
+                <p:cNvPr id="13" name="TextBox 12">
+                  <a:extLst>
+                    <a:ext uri="{FF2B5EF4-FFF2-40B4-BE49-F238E27FC236}">
+                      <a16:creationId xmlns:a16="http://schemas.microsoft.com/office/drawing/2014/main" id="{0A9FD6B8-2B9B-D2C5-3A20-14962E301DF1}"/>
+                    </a:ext>
+                  </a:extLst>
+                </p:cNvPr>
+                <p:cNvSpPr txBox="1">
+                  <a:spLocks noRot="1" noChangeAspect="1" noMove="1" noResize="1" noEditPoints="1" noAdjustHandles="1" noChangeArrowheads="1" noChangeShapeType="1" noTextEdit="1"/>
+                </p:cNvSpPr>
+                <p:nvPr/>
+              </p:nvSpPr>
+              <p:spPr>
+                <a:xfrm>
+                  <a:off x="4114800" y="1006170"/>
+                  <a:ext cx="355663" cy="307777"/>
+                </a:xfrm>
+                <a:prstGeom prst="rect">
+                  <a:avLst/>
+                </a:prstGeom>
+                <a:blipFill>
+                  <a:blip r:embed="rId7"/>
+                  <a:stretch>
+                    <a:fillRect r="-17241" b="-5882"/>
+                  </a:stretch>
+                </a:blipFill>
+              </p:spPr>
+              <p:txBody>
+                <a:bodyPr/>
+                <a:lstStyle/>
+                <a:p>
+                  <a:r>
+                    <a:rPr lang="en-US">
+                      <a:noFill/>
+                    </a:rPr>
+                    <a:t> </a:t>
+                  </a:r>
+                </a:p>
+              </p:txBody>
+            </p:sp>
+          </mc:Fallback>
+        </mc:AlternateContent>
+        <mc:AlternateContent xmlns:mc="http://schemas.openxmlformats.org/markup-compatibility/2006">
+          <mc:Choice xmlns:a14="http://schemas.microsoft.com/office/drawing/2010/main" Requires="a14">
+            <p:sp>
+              <p:nvSpPr>
+                <p:cNvPr id="15" name="TextBox 14">
+                  <a:extLst>
+                    <a:ext uri="{FF2B5EF4-FFF2-40B4-BE49-F238E27FC236}">
+                      <a16:creationId xmlns:a16="http://schemas.microsoft.com/office/drawing/2014/main" id="{CADAD4FC-805D-E003-5077-0792246A199F}"/>
+                    </a:ext>
+                  </a:extLst>
+                </p:cNvPr>
+                <p:cNvSpPr txBox="1"/>
+                <p:nvPr/>
+              </p:nvSpPr>
+              <p:spPr>
+                <a:xfrm>
+                  <a:off x="558737" y="3851551"/>
+                  <a:ext cx="355663" cy="307777"/>
+                </a:xfrm>
+                <a:prstGeom prst="rect">
+                  <a:avLst/>
+                </a:prstGeom>
+                <a:noFill/>
+              </p:spPr>
+              <p:txBody>
+                <a:bodyPr wrap="square" rtlCol="0">
+                  <a:spAutoFit/>
+                </a:bodyPr>
+                <a:lstStyle/>
+                <a:p>
+                  <a:pPr/>
+                  <a14:m>
+                    <m:oMathPara xmlns:m="http://schemas.openxmlformats.org/officeDocument/2006/math">
+                      <m:oMathParaPr>
+                        <m:jc m:val="centerGroup"/>
+                      </m:oMathParaPr>
+                      <m:oMath xmlns:m="http://schemas.openxmlformats.org/officeDocument/2006/math">
+                        <m:r>
+                          <a:rPr lang="en-US" sz="1400" b="0" i="0" smtClean="0">
+                            <a:latin typeface="Cambria Math" panose="02040503050406030204" pitchFamily="18" charset="0"/>
+                          </a:rPr>
+                          <m:t>(</m:t>
+                        </m:r>
+                        <m:r>
+                          <m:rPr>
+                            <m:sty m:val="p"/>
+                          </m:rPr>
+                          <a:rPr lang="en-US" sz="1400" b="0" i="0" smtClean="0">
+                            <a:latin typeface="Cambria Math" panose="02040503050406030204" pitchFamily="18" charset="0"/>
+                          </a:rPr>
+                          <m:t>c</m:t>
+                        </m:r>
+                        <m:r>
+                          <a:rPr lang="en-US" sz="1400" b="0" i="0" smtClean="0">
+                            <a:latin typeface="Cambria Math" panose="02040503050406030204" pitchFamily="18" charset="0"/>
+                          </a:rPr>
+                          <m:t>)</m:t>
+                        </m:r>
+                      </m:oMath>
+                    </m:oMathPara>
+                  </a14:m>
+                  <a:endParaRPr lang="en-US" sz="1400" dirty="0"/>
+                </a:p>
+              </p:txBody>
+            </p:sp>
+          </mc:Choice>
+          <mc:Fallback>
+            <p:sp>
+              <p:nvSpPr>
+                <p:cNvPr id="15" name="TextBox 14">
+                  <a:extLst>
+                    <a:ext uri="{FF2B5EF4-FFF2-40B4-BE49-F238E27FC236}">
+                      <a16:creationId xmlns:a16="http://schemas.microsoft.com/office/drawing/2014/main" id="{CADAD4FC-805D-E003-5077-0792246A199F}"/>
+                    </a:ext>
+                  </a:extLst>
+                </p:cNvPr>
+                <p:cNvSpPr txBox="1">
+                  <a:spLocks noRot="1" noChangeAspect="1" noMove="1" noResize="1" noEditPoints="1" noAdjustHandles="1" noChangeArrowheads="1" noChangeShapeType="1" noTextEdit="1"/>
+                </p:cNvSpPr>
+                <p:nvPr/>
+              </p:nvSpPr>
+              <p:spPr>
+                <a:xfrm>
+                  <a:off x="558737" y="3851551"/>
+                  <a:ext cx="355663" cy="307777"/>
+                </a:xfrm>
+                <a:prstGeom prst="rect">
+                  <a:avLst/>
+                </a:prstGeom>
+                <a:blipFill>
+                  <a:blip r:embed="rId8"/>
+                  <a:stretch>
+                    <a:fillRect r="-12069" b="-8000"/>
+                  </a:stretch>
+                </a:blipFill>
+              </p:spPr>
+              <p:txBody>
+                <a:bodyPr/>
+                <a:lstStyle/>
+                <a:p>
+                  <a:r>
+                    <a:rPr lang="en-US">
+                      <a:noFill/>
+                    </a:rPr>
+                    <a:t> </a:t>
+                  </a:r>
+                </a:p>
+              </p:txBody>
+            </p:sp>
+          </mc:Fallback>
+        </mc:AlternateContent>
+        <mc:AlternateContent xmlns:mc="http://schemas.openxmlformats.org/markup-compatibility/2006">
+          <mc:Choice xmlns:a14="http://schemas.microsoft.com/office/drawing/2010/main" Requires="a14">
+            <p:sp>
+              <p:nvSpPr>
+                <p:cNvPr id="16" name="TextBox 15">
+                  <a:extLst>
+                    <a:ext uri="{FF2B5EF4-FFF2-40B4-BE49-F238E27FC236}">
+                      <a16:creationId xmlns:a16="http://schemas.microsoft.com/office/drawing/2014/main" id="{A1AB2820-9557-601F-A6BB-34E690431BCF}"/>
+                    </a:ext>
+                  </a:extLst>
+                </p:cNvPr>
+                <p:cNvSpPr txBox="1"/>
+                <p:nvPr/>
+              </p:nvSpPr>
+              <p:spPr>
+                <a:xfrm>
+                  <a:off x="4114800" y="3853051"/>
+                  <a:ext cx="355663" cy="307777"/>
+                </a:xfrm>
+                <a:prstGeom prst="rect">
+                  <a:avLst/>
+                </a:prstGeom>
+                <a:noFill/>
+              </p:spPr>
+              <p:txBody>
+                <a:bodyPr wrap="square" rtlCol="0">
+                  <a:spAutoFit/>
+                </a:bodyPr>
+                <a:lstStyle/>
+                <a:p>
+                  <a:pPr/>
+                  <a14:m>
+                    <m:oMathPara xmlns:m="http://schemas.openxmlformats.org/officeDocument/2006/math">
+                      <m:oMathParaPr>
+                        <m:jc m:val="centerGroup"/>
+                      </m:oMathParaPr>
+                      <m:oMath xmlns:m="http://schemas.openxmlformats.org/officeDocument/2006/math">
+                        <m:r>
+                          <a:rPr lang="en-US" sz="1400" b="0" i="0" smtClean="0">
+                            <a:latin typeface="Cambria Math" panose="02040503050406030204" pitchFamily="18" charset="0"/>
+                          </a:rPr>
+                          <m:t>(</m:t>
+                        </m:r>
+                        <m:r>
+                          <m:rPr>
+                            <m:sty m:val="p"/>
+                          </m:rPr>
+                          <a:rPr lang="en-US" sz="1400" b="0" i="0" smtClean="0">
+                            <a:latin typeface="Cambria Math" panose="02040503050406030204" pitchFamily="18" charset="0"/>
+                          </a:rPr>
+                          <m:t>d</m:t>
+                        </m:r>
+                        <m:r>
+                          <a:rPr lang="en-US" sz="1400" b="0" i="0" smtClean="0">
+                            <a:latin typeface="Cambria Math" panose="02040503050406030204" pitchFamily="18" charset="0"/>
+                          </a:rPr>
+                          <m:t>)</m:t>
+                        </m:r>
+                      </m:oMath>
+                    </m:oMathPara>
+                  </a14:m>
+                  <a:endParaRPr lang="en-US" sz="1400" dirty="0"/>
+                </a:p>
+              </p:txBody>
+            </p:sp>
+          </mc:Choice>
+          <mc:Fallback>
+            <p:sp>
+              <p:nvSpPr>
+                <p:cNvPr id="16" name="TextBox 15">
+                  <a:extLst>
+                    <a:ext uri="{FF2B5EF4-FFF2-40B4-BE49-F238E27FC236}">
+                      <a16:creationId xmlns:a16="http://schemas.microsoft.com/office/drawing/2014/main" id="{A1AB2820-9557-601F-A6BB-34E690431BCF}"/>
+                    </a:ext>
+                  </a:extLst>
+                </p:cNvPr>
+                <p:cNvSpPr txBox="1">
+                  <a:spLocks noRot="1" noChangeAspect="1" noMove="1" noResize="1" noEditPoints="1" noAdjustHandles="1" noChangeArrowheads="1" noChangeShapeType="1" noTextEdit="1"/>
+                </p:cNvSpPr>
+                <p:nvPr/>
+              </p:nvSpPr>
+              <p:spPr>
+                <a:xfrm>
+                  <a:off x="4114800" y="3853051"/>
+                  <a:ext cx="355663" cy="307777"/>
+                </a:xfrm>
+                <a:prstGeom prst="rect">
+                  <a:avLst/>
+                </a:prstGeom>
+                <a:blipFill>
+                  <a:blip r:embed="rId9"/>
+                  <a:stretch>
+                    <a:fillRect r="-17241" b="-5882"/>
+                  </a:stretch>
+                </a:blipFill>
+              </p:spPr>
+              <p:txBody>
+                <a:bodyPr/>
+                <a:lstStyle/>
+                <a:p>
+                  <a:r>
+                    <a:rPr lang="en-US">
+                      <a:noFill/>
+                    </a:rPr>
+                    <a:t> </a:t>
+                  </a:r>
+                </a:p>
+              </p:txBody>
+            </p:sp>
+          </mc:Fallback>
+        </mc:AlternateContent>
+      </p:grpSp>
+    </p:spTree>
+    <p:extLst>
+      <p:ext uri="{BB962C8B-B14F-4D97-AF65-F5344CB8AC3E}">
+        <p14:creationId xmlns:p14="http://schemas.microsoft.com/office/powerpoint/2010/main" val="181299117"/>
+      </p:ext>
+    </p:extLst>
+  </p:cSld>
+  <p:clrMapOvr>
+    <a:masterClrMapping/>
+  </p:clrMapOvr>
+</p:sld>
+</file>
+
+<file path=ppt/slides/slide3.xml><?xml version="1.0" encoding="utf-8"?>
+<p:sld xmlns:a="http://schemas.openxmlformats.org/drawingml/2006/main" xmlns:r="http://schemas.openxmlformats.org/officeDocument/2006/relationships" xmlns:p="http://schemas.openxmlformats.org/presentationml/2006/main">
+  <p:cSld>
+    <p:spTree>
+      <p:nvGrpSpPr>
         <p:cNvPr id="1" name=""/>
         <p:cNvGrpSpPr/>
         <p:nvPr/>
@@ -4255,6 +4902,355 @@
 </p:sld>
 </file>
 
+<file path=ppt/slides/slide4.xml><?xml version="1.0" encoding="utf-8"?>
+<p:sld xmlns:a="http://schemas.openxmlformats.org/drawingml/2006/main" xmlns:r="http://schemas.openxmlformats.org/officeDocument/2006/relationships" xmlns:p="http://schemas.openxmlformats.org/presentationml/2006/main">
+  <p:cSld>
+    <p:spTree>
+      <p:nvGrpSpPr>
+        <p:cNvPr id="1" name="">
+          <a:extLst>
+            <a:ext uri="{FF2B5EF4-FFF2-40B4-BE49-F238E27FC236}">
+              <a16:creationId xmlns:a16="http://schemas.microsoft.com/office/drawing/2014/main" id="{A15B2ED4-C42A-0EC9-5F1F-8E690E5C62B8}"/>
+            </a:ext>
+          </a:extLst>
+        </p:cNvPr>
+        <p:cNvGrpSpPr/>
+        <p:nvPr/>
+      </p:nvGrpSpPr>
+      <p:grpSpPr>
+        <a:xfrm>
+          <a:off x="0" y="0"/>
+          <a:ext cx="0" cy="0"/>
+          <a:chOff x="0" y="0"/>
+          <a:chExt cx="0" cy="0"/>
+        </a:xfrm>
+      </p:grpSpPr>
+      <p:grpSp>
+        <p:nvGrpSpPr>
+          <p:cNvPr id="2" name="Group 1">
+            <a:extLst>
+              <a:ext uri="{FF2B5EF4-FFF2-40B4-BE49-F238E27FC236}">
+                <a16:creationId xmlns:a16="http://schemas.microsoft.com/office/drawing/2014/main" id="{63CDFB19-3936-80FB-C964-6CBFD6305CFA}"/>
+              </a:ext>
+            </a:extLst>
+          </p:cNvPr>
+          <p:cNvGrpSpPr/>
+          <p:nvPr/>
+        </p:nvGrpSpPr>
+        <p:grpSpPr>
+          <a:xfrm>
+            <a:off x="558737" y="999876"/>
+            <a:ext cx="6654926" cy="2743200"/>
+            <a:chOff x="558737" y="999876"/>
+            <a:chExt cx="6654926" cy="2743200"/>
+          </a:xfrm>
+        </p:grpSpPr>
+        <p:pic>
+          <p:nvPicPr>
+            <p:cNvPr id="3" name="Picture 2">
+              <a:extLst>
+                <a:ext uri="{FF2B5EF4-FFF2-40B4-BE49-F238E27FC236}">
+                  <a16:creationId xmlns:a16="http://schemas.microsoft.com/office/drawing/2014/main" id="{2926FF1D-84AA-A3AF-02D7-C63F4287D216}"/>
+                </a:ext>
+              </a:extLst>
+            </p:cNvPr>
+            <p:cNvPicPr>
+              <a:picLocks noChangeAspect="1"/>
+            </p:cNvPicPr>
+            <p:nvPr/>
+          </p:nvPicPr>
+          <p:blipFill>
+            <a:blip r:embed="rId2">
+              <a:extLst>
+                <a:ext uri="{28A0092B-C50C-407E-A947-70E740481C1C}">
+                  <a14:useLocalDpi xmlns:a14="http://schemas.microsoft.com/office/drawing/2010/main" val="0"/>
+                </a:ext>
+              </a:extLst>
+            </a:blip>
+            <a:srcRect/>
+            <a:stretch/>
+          </p:blipFill>
+          <p:spPr>
+            <a:xfrm>
+              <a:off x="914400" y="999876"/>
+              <a:ext cx="2743200" cy="2743200"/>
+            </a:xfrm>
+            <a:prstGeom prst="rect">
+              <a:avLst/>
+            </a:prstGeom>
+          </p:spPr>
+        </p:pic>
+        <p:pic>
+          <p:nvPicPr>
+            <p:cNvPr id="6" name="Picture 5">
+              <a:extLst>
+                <a:ext uri="{FF2B5EF4-FFF2-40B4-BE49-F238E27FC236}">
+                  <a16:creationId xmlns:a16="http://schemas.microsoft.com/office/drawing/2014/main" id="{25D47B63-623F-0C49-90C9-1CFE591739B2}"/>
+                </a:ext>
+              </a:extLst>
+            </p:cNvPr>
+            <p:cNvPicPr>
+              <a:picLocks noChangeAspect="1"/>
+            </p:cNvPicPr>
+            <p:nvPr/>
+          </p:nvPicPr>
+          <p:blipFill>
+            <a:blip r:embed="rId3">
+              <a:extLst>
+                <a:ext uri="{28A0092B-C50C-407E-A947-70E740481C1C}">
+                  <a14:useLocalDpi xmlns:a14="http://schemas.microsoft.com/office/drawing/2010/main" val="0"/>
+                </a:ext>
+              </a:extLst>
+            </a:blip>
+            <a:srcRect/>
+            <a:stretch/>
+          </p:blipFill>
+          <p:spPr>
+            <a:xfrm>
+              <a:off x="4470463" y="999876"/>
+              <a:ext cx="2743200" cy="2743200"/>
+            </a:xfrm>
+            <a:prstGeom prst="rect">
+              <a:avLst/>
+            </a:prstGeom>
+          </p:spPr>
+        </p:pic>
+        <mc:AlternateContent xmlns:mc="http://schemas.openxmlformats.org/markup-compatibility/2006">
+          <mc:Choice xmlns:a14="http://schemas.microsoft.com/office/drawing/2010/main" Requires="a14">
+            <p:sp>
+              <p:nvSpPr>
+                <p:cNvPr id="7" name="TextBox 6">
+                  <a:extLst>
+                    <a:ext uri="{FF2B5EF4-FFF2-40B4-BE49-F238E27FC236}">
+                      <a16:creationId xmlns:a16="http://schemas.microsoft.com/office/drawing/2014/main" id="{1CA017D0-6A9A-A636-8858-C1140CB3427C}"/>
+                    </a:ext>
+                  </a:extLst>
+                </p:cNvPr>
+                <p:cNvSpPr txBox="1"/>
+                <p:nvPr/>
+              </p:nvSpPr>
+              <p:spPr>
+                <a:xfrm>
+                  <a:off x="558737" y="1004670"/>
+                  <a:ext cx="355663" cy="307777"/>
+                </a:xfrm>
+                <a:prstGeom prst="rect">
+                  <a:avLst/>
+                </a:prstGeom>
+                <a:noFill/>
+              </p:spPr>
+              <p:txBody>
+                <a:bodyPr wrap="square" rtlCol="0">
+                  <a:spAutoFit/>
+                </a:bodyPr>
+                <a:lstStyle/>
+                <a:p>
+                  <a:pPr/>
+                  <a14:m>
+                    <m:oMathPara xmlns:m="http://schemas.openxmlformats.org/officeDocument/2006/math">
+                      <m:oMathParaPr>
+                        <m:jc m:val="centerGroup"/>
+                      </m:oMathParaPr>
+                      <m:oMath xmlns:m="http://schemas.openxmlformats.org/officeDocument/2006/math">
+                        <m:r>
+                          <a:rPr lang="en-US" sz="1400" b="0" i="0" smtClean="0">
+                            <a:latin typeface="Cambria Math" panose="02040503050406030204" pitchFamily="18" charset="0"/>
+                          </a:rPr>
+                          <m:t>(</m:t>
+                        </m:r>
+                        <m:r>
+                          <m:rPr>
+                            <m:sty m:val="p"/>
+                          </m:rPr>
+                          <a:rPr lang="en-US" sz="1400" b="0" i="0" smtClean="0">
+                            <a:latin typeface="Cambria Math" panose="02040503050406030204" pitchFamily="18" charset="0"/>
+                          </a:rPr>
+                          <m:t>a</m:t>
+                        </m:r>
+                        <m:r>
+                          <a:rPr lang="en-US" sz="1400" b="0" i="0" smtClean="0">
+                            <a:latin typeface="Cambria Math" panose="02040503050406030204" pitchFamily="18" charset="0"/>
+                          </a:rPr>
+                          <m:t>)</m:t>
+                        </m:r>
+                      </m:oMath>
+                    </m:oMathPara>
+                  </a14:m>
+                  <a:endParaRPr lang="en-US" sz="1400" dirty="0"/>
+                </a:p>
+              </p:txBody>
+            </p:sp>
+          </mc:Choice>
+          <mc:Fallback>
+            <p:sp>
+              <p:nvSpPr>
+                <p:cNvPr id="7" name="TextBox 6">
+                  <a:extLst>
+                    <a:ext uri="{FF2B5EF4-FFF2-40B4-BE49-F238E27FC236}">
+                      <a16:creationId xmlns:a16="http://schemas.microsoft.com/office/drawing/2014/main" id="{1CA017D0-6A9A-A636-8858-C1140CB3427C}"/>
+                    </a:ext>
+                  </a:extLst>
+                </p:cNvPr>
+                <p:cNvSpPr txBox="1">
+                  <a:spLocks noRot="1" noChangeAspect="1" noMove="1" noResize="1" noEditPoints="1" noAdjustHandles="1" noChangeArrowheads="1" noChangeShapeType="1" noTextEdit="1"/>
+                </p:cNvSpPr>
+                <p:nvPr/>
+              </p:nvSpPr>
+              <p:spPr>
+                <a:xfrm>
+                  <a:off x="558737" y="1004670"/>
+                  <a:ext cx="355663" cy="307777"/>
+                </a:xfrm>
+                <a:prstGeom prst="rect">
+                  <a:avLst/>
+                </a:prstGeom>
+                <a:blipFill>
+                  <a:blip r:embed="rId4"/>
+                  <a:stretch>
+                    <a:fillRect r="-13793" b="-8000"/>
+                  </a:stretch>
+                </a:blipFill>
+              </p:spPr>
+              <p:txBody>
+                <a:bodyPr/>
+                <a:lstStyle/>
+                <a:p>
+                  <a:r>
+                    <a:rPr lang="en-US">
+                      <a:noFill/>
+                    </a:rPr>
+                    <a:t> </a:t>
+                  </a:r>
+                </a:p>
+              </p:txBody>
+            </p:sp>
+          </mc:Fallback>
+        </mc:AlternateContent>
+        <mc:AlternateContent xmlns:mc="http://schemas.openxmlformats.org/markup-compatibility/2006">
+          <mc:Choice xmlns:a14="http://schemas.microsoft.com/office/drawing/2010/main" Requires="a14">
+            <p:sp>
+              <p:nvSpPr>
+                <p:cNvPr id="8" name="TextBox 7">
+                  <a:extLst>
+                    <a:ext uri="{FF2B5EF4-FFF2-40B4-BE49-F238E27FC236}">
+                      <a16:creationId xmlns:a16="http://schemas.microsoft.com/office/drawing/2014/main" id="{28387C6D-607B-95C6-5D92-427B65BC2A0A}"/>
+                    </a:ext>
+                  </a:extLst>
+                </p:cNvPr>
+                <p:cNvSpPr txBox="1"/>
+                <p:nvPr/>
+              </p:nvSpPr>
+              <p:spPr>
+                <a:xfrm>
+                  <a:off x="4114800" y="1004670"/>
+                  <a:ext cx="355663" cy="307777"/>
+                </a:xfrm>
+                <a:prstGeom prst="rect">
+                  <a:avLst/>
+                </a:prstGeom>
+                <a:noFill/>
+              </p:spPr>
+              <p:txBody>
+                <a:bodyPr wrap="square" rtlCol="0">
+                  <a:spAutoFit/>
+                </a:bodyPr>
+                <a:lstStyle/>
+                <a:p>
+                  <a:pPr/>
+                  <a14:m>
+                    <m:oMathPara xmlns:m="http://schemas.openxmlformats.org/officeDocument/2006/math">
+                      <m:oMathParaPr>
+                        <m:jc m:val="centerGroup"/>
+                      </m:oMathParaPr>
+                      <m:oMath xmlns:m="http://schemas.openxmlformats.org/officeDocument/2006/math">
+                        <m:r>
+                          <a:rPr lang="en-US" sz="1400" b="0" i="0" smtClean="0">
+                            <a:latin typeface="Cambria Math" panose="02040503050406030204" pitchFamily="18" charset="0"/>
+                          </a:rPr>
+                          <m:t>(</m:t>
+                        </m:r>
+                        <m:r>
+                          <m:rPr>
+                            <m:sty m:val="p"/>
+                          </m:rPr>
+                          <a:rPr lang="en-US" sz="1400" b="0" i="0" smtClean="0">
+                            <a:latin typeface="Cambria Math" panose="02040503050406030204" pitchFamily="18" charset="0"/>
+                          </a:rPr>
+                          <m:t>b</m:t>
+                        </m:r>
+                        <m:r>
+                          <a:rPr lang="en-US" sz="1400" b="0" i="0" smtClean="0">
+                            <a:latin typeface="Cambria Math" panose="02040503050406030204" pitchFamily="18" charset="0"/>
+                          </a:rPr>
+                          <m:t>)</m:t>
+                        </m:r>
+                      </m:oMath>
+                    </m:oMathPara>
+                  </a14:m>
+                  <a:endParaRPr lang="en-US" sz="1400" dirty="0"/>
+                </a:p>
+              </p:txBody>
+            </p:sp>
+          </mc:Choice>
+          <mc:Fallback>
+            <p:sp>
+              <p:nvSpPr>
+                <p:cNvPr id="8" name="TextBox 7">
+                  <a:extLst>
+                    <a:ext uri="{FF2B5EF4-FFF2-40B4-BE49-F238E27FC236}">
+                      <a16:creationId xmlns:a16="http://schemas.microsoft.com/office/drawing/2014/main" id="{28387C6D-607B-95C6-5D92-427B65BC2A0A}"/>
+                    </a:ext>
+                  </a:extLst>
+                </p:cNvPr>
+                <p:cNvSpPr txBox="1">
+                  <a:spLocks noRot="1" noChangeAspect="1" noMove="1" noResize="1" noEditPoints="1" noAdjustHandles="1" noChangeArrowheads="1" noChangeShapeType="1" noTextEdit="1"/>
+                </p:cNvSpPr>
+                <p:nvPr/>
+              </p:nvSpPr>
+              <p:spPr>
+                <a:xfrm>
+                  <a:off x="4114800" y="1004670"/>
+                  <a:ext cx="355663" cy="307777"/>
+                </a:xfrm>
+                <a:prstGeom prst="rect">
+                  <a:avLst/>
+                </a:prstGeom>
+                <a:blipFill>
+                  <a:blip r:embed="rId5"/>
+                  <a:stretch>
+                    <a:fillRect r="-17241" b="-8000"/>
+                  </a:stretch>
+                </a:blipFill>
+              </p:spPr>
+              <p:txBody>
+                <a:bodyPr/>
+                <a:lstStyle/>
+                <a:p>
+                  <a:r>
+                    <a:rPr lang="en-US">
+                      <a:noFill/>
+                    </a:rPr>
+                    <a:t> </a:t>
+                  </a:r>
+                </a:p>
+              </p:txBody>
+            </p:sp>
+          </mc:Fallback>
+        </mc:AlternateContent>
+      </p:grpSp>
+    </p:spTree>
+    <p:extLst>
+      <p:ext uri="{BB962C8B-B14F-4D97-AF65-F5344CB8AC3E}">
+        <p14:creationId xmlns:p14="http://schemas.microsoft.com/office/powerpoint/2010/main" val="2058203186"/>
+      </p:ext>
+    </p:extLst>
+  </p:cSld>
+  <p:clrMapOvr>
+    <a:masterClrMapping/>
+  </p:clrMapOvr>
+</p:sld>
+</file>
+
 <file path=ppt/theme/theme1.xml><?xml version="1.0" encoding="utf-8"?>
 <a:theme xmlns:a="http://schemas.openxmlformats.org/drawingml/2006/main" name="Office Theme">
   <a:themeElements>
